--- a/plano-de-aulas/aula-07-slides.pptx
+++ b/plano-de-aulas/aula-07-slides.pptx
@@ -3491,7 +3491,7 @@
           <a:lstStyle/>
           <a:p>
             <a:r>
-              <a:t>Resiliência: retry e circuit breaker</a:t>
+              <a:t>Tópicos / eventos com Kafka</a:t>
             </a:r>
           </a:p>
         </p:txBody>
@@ -3512,7 +3512,7 @@
           <a:lstStyle/>
           <a:p>
             <a:r>
-              <a:t>BE-JV-010 · Aula 7 · 06/07 · Resiliência e retry</a:t>
+              <a:t>BE-JV-010 · Aula 6 · 03/07 · Tópicos / pub-sub</a:t>
             </a:r>
           </a:p>
         </p:txBody>
@@ -3572,17 +3572,17 @@
           <a:lstStyle/>
           <a:p>
             <a:r>
-              <a:t>A notificação depende de um gateway externo que oscila.</a:t>
+              <a:t>Depois de gravar, 3 áreas querem reagir: notificação, antifraude e BI.</a:t>
             </a:r>
           </a:p>
           <a:p>
             <a:r>
-              <a:t>Queremos reentregar sem inundar</a:t>
+              <a:t>O gravador não pode conhecer todas.</a:t>
             </a:r>
           </a:p>
           <a:p>
             <a:r>
-              <a:t>e parar de tentar quando claramente está fora.</a:t>
+              <a:t>Como avisar 'aconteceu' sem acoplar?</a:t>
             </a:r>
           </a:p>
         </p:txBody>
@@ -3659,27 +3659,22 @@
           <a:lstStyle/>
           <a:p>
             <a:r>
-              <a:t>Backoff exponencial + jitter (evitar retry storm)</a:t>
+              <a:t>Fila × tópico</a:t>
             </a:r>
           </a:p>
           <a:p>
             <a:r>
-              <a:t>Idempotência como pré-condição</a:t>
+              <a:t>Log de eventos, offset, consumer group, partição</a:t>
             </a:r>
           </a:p>
           <a:p>
             <a:r>
-              <a:t>Circuit breaker: closed/open/half-open</a:t>
+              <a:t>Event sourcing e replay</a:t>
             </a:r>
           </a:p>
           <a:p>
             <a:r>
-              <a:t>Timeout e bulkhead</a:t>
-            </a:r>
-          </a:p>
-          <a:p>
-            <a:r>
-              <a:t>@RetryableTopic + DLT</a:t>
+              <a:t>Ordenação por chave</a:t>
             </a:r>
           </a:p>
         </p:txBody>
@@ -3756,12 +3751,12 @@
           <a:lstStyle/>
           <a:p>
             <a:r>
-              <a:t>'Reprocessamento do batch que deu erro' e limites de retentativa do scheduler</a:t>
+              <a:t>O 'arquivo de movimento do dia' lido por vários jobs noturnos</a:t>
             </a:r>
           </a:p>
           <a:p>
             <a:r>
-              <a:t>agora reativos e por requisição</a:t>
+              <a:t>já era um log de eventos batch — Kafka é isso em streaming</a:t>
             </a:r>
           </a:p>
         </p:txBody>
@@ -3838,17 +3833,17 @@
           <a:lstStyle/>
           <a:p>
             <a:r>
-              <a:t>APIs de LLM são instáveis por natureza (rate limit, timeout, 5xx)</a:t>
+              <a:t>Arquitetura event-driven para agentes</a:t>
             </a:r>
           </a:p>
           <a:p>
             <a:r>
-              <a:t>Fallback de modelo quando o circuito abre</a:t>
+              <a:t>Event sourcing como memória reproduzível do agente</a:t>
             </a:r>
           </a:p>
           <a:p>
             <a:r>
-              <a:t>Idempotência com saída não-determinística</a:t>
+              <a:t>Streaming para ingestão/RAG contínuos</a:t>
             </a:r>
           </a:p>
         </p:txBody>
@@ -3925,12 +3920,12 @@
           <a:lstStyle/>
           <a:p>
             <a:r>
-              <a:t>Base: @RetryableTopic com backoff até a DLT</a:t>
+              <a:t>Base: plugar um 3º consumer group que lê desde o início</a:t>
             </a:r>
           </a:p>
           <a:p>
             <a:r>
-              <a:t>Stretch: retry + breaker + idempotência sob falha intermitente E permanente</a:t>
+              <a:t>Stretch: particionamento/ordenação por chave e o que quebra</a:t>
             </a:r>
           </a:p>
         </p:txBody>
@@ -3986,7 +3981,7 @@
           <a:lstStyle/>
           <a:p>
             <a:r>
-              <a:t>Resiliência é decidir como falhar de propósito, antes que o sistema decida por você.</a:t>
+              <a:t>Fila entrega trabalho; tópico publica história.</a:t>
             </a:r>
           </a:p>
         </p:txBody>
